--- a/Reporte 150926.pptx
+++ b/Reporte 150926.pptx
@@ -5,7 +5,7 @@
     <p:sldMasterId id="2147483672" r:id="rId1"/>
   </p:sldMasterIdLst>
   <p:notesMasterIdLst>
-    <p:notesMasterId r:id="rId20"/>
+    <p:notesMasterId r:id="rId19"/>
   </p:notesMasterIdLst>
   <p:sldIdLst>
     <p:sldId id="350" r:id="rId2"/>
@@ -23,24 +23,23 @@
     <p:sldId id="361" r:id="rId14"/>
     <p:sldId id="412" r:id="rId15"/>
     <p:sldId id="371" r:id="rId16"/>
-    <p:sldId id="414" r:id="rId17"/>
-    <p:sldId id="413" r:id="rId18"/>
-    <p:sldId id="280" r:id="rId19"/>
+    <p:sldId id="413" r:id="rId17"/>
+    <p:sldId id="280" r:id="rId18"/>
   </p:sldIdLst>
   <p:sldSz cx="9144000" cy="5143500" type="screen16x9"/>
   <p:notesSz cx="6858000" cy="9144000"/>
   <p:embeddedFontLst>
     <p:embeddedFont>
       <p:font typeface="Montserrat" panose="00000500000000000000" pitchFamily="2" charset="0"/>
-      <p:regular r:id="rId21"/>
-      <p:bold r:id="rId22"/>
-      <p:italic r:id="rId23"/>
-      <p:boldItalic r:id="rId24"/>
+      <p:regular r:id="rId20"/>
+      <p:bold r:id="rId21"/>
+      <p:italic r:id="rId22"/>
+      <p:boldItalic r:id="rId23"/>
     </p:embeddedFont>
     <p:embeddedFont>
       <p:font typeface="Montserrat Black" panose="00000A00000000000000" pitchFamily="2" charset="0"/>
-      <p:bold r:id="rId25"/>
-      <p:boldItalic r:id="rId26"/>
+      <p:bold r:id="rId24"/>
+      <p:boldItalic r:id="rId25"/>
     </p:embeddedFont>
   </p:embeddedFontLst>
   <p:defaultTextStyle>
@@ -6778,10 +6777,10 @@
       </p:sp>
       <p:pic>
         <p:nvPicPr>
-          <p:cNvPr id="4" name="Imagen 3">
+          <p:cNvPr id="5" name="Imagen 4">
             <a:extLst>
               <a:ext uri="{FF2B5EF4-FFF2-40B4-BE49-F238E27FC236}">
-                <a16:creationId xmlns:a16="http://schemas.microsoft.com/office/drawing/2014/main" id="{2B892F82-BD78-9BAE-C380-1EEBD6E32BF9}"/>
+                <a16:creationId xmlns:a16="http://schemas.microsoft.com/office/drawing/2014/main" id="{3B45D2FB-A92F-44FD-FD46-1F884083DC80}"/>
               </a:ext>
             </a:extLst>
           </p:cNvPr>
@@ -6798,8 +6797,8 @@
         </p:blipFill>
         <p:spPr>
           <a:xfrm>
-            <a:off x="0" y="511300"/>
-            <a:ext cx="9144000" cy="4263775"/>
+            <a:off x="0" y="729446"/>
+            <a:ext cx="9144000" cy="3827483"/>
           </a:xfrm>
           <a:prstGeom prst="rect">
             <a:avLst/>
@@ -6884,10 +6883,10 @@
       </p:sp>
       <p:pic>
         <p:nvPicPr>
-          <p:cNvPr id="3" name="Imagen 2">
+          <p:cNvPr id="4" name="Imagen 3">
             <a:extLst>
               <a:ext uri="{FF2B5EF4-FFF2-40B4-BE49-F238E27FC236}">
-                <a16:creationId xmlns:a16="http://schemas.microsoft.com/office/drawing/2014/main" id="{66C1CF30-31A7-CADE-5987-BF1D9B53ACD1}"/>
+                <a16:creationId xmlns:a16="http://schemas.microsoft.com/office/drawing/2014/main" id="{4BE3E578-8F20-1B9E-0BDC-9482FC4EEB50}"/>
               </a:ext>
             </a:extLst>
           </p:cNvPr>
@@ -6904,8 +6903,8 @@
         </p:blipFill>
         <p:spPr>
           <a:xfrm>
-            <a:off x="0" y="985323"/>
-            <a:ext cx="9144000" cy="3315730"/>
+            <a:off x="0" y="1171974"/>
+            <a:ext cx="9144000" cy="2942427"/>
           </a:xfrm>
           <a:prstGeom prst="rect">
             <a:avLst/>
@@ -6990,10 +6989,10 @@
       </p:sp>
       <p:pic>
         <p:nvPicPr>
-          <p:cNvPr id="5" name="Imagen 4">
+          <p:cNvPr id="4" name="Imagen 3">
             <a:extLst>
               <a:ext uri="{FF2B5EF4-FFF2-40B4-BE49-F238E27FC236}">
-                <a16:creationId xmlns:a16="http://schemas.microsoft.com/office/drawing/2014/main" id="{EB115770-BB1F-EF78-019B-B929C19F3128}"/>
+                <a16:creationId xmlns:a16="http://schemas.microsoft.com/office/drawing/2014/main" id="{EE68AD2C-2DEB-9BC3-0A20-8CE13E29F548}"/>
               </a:ext>
             </a:extLst>
           </p:cNvPr>
@@ -7010,8 +7009,8 @@
         </p:blipFill>
         <p:spPr>
           <a:xfrm>
-            <a:off x="0" y="910128"/>
-            <a:ext cx="9144000" cy="3466119"/>
+            <a:off x="0" y="435429"/>
+            <a:ext cx="9144000" cy="4415518"/>
           </a:xfrm>
           <a:prstGeom prst="rect">
             <a:avLst/>
@@ -7096,10 +7095,10 @@
       </p:sp>
       <p:pic>
         <p:nvPicPr>
-          <p:cNvPr id="3" name="Imagen 2">
+          <p:cNvPr id="4" name="Imagen 3">
             <a:extLst>
               <a:ext uri="{FF2B5EF4-FFF2-40B4-BE49-F238E27FC236}">
-                <a16:creationId xmlns:a16="http://schemas.microsoft.com/office/drawing/2014/main" id="{AA8CDF2C-77CE-5BA2-4CA1-E586A428B536}"/>
+                <a16:creationId xmlns:a16="http://schemas.microsoft.com/office/drawing/2014/main" id="{67D6DEE1-6CF0-6F14-FF14-F07E9FF0AA9E}"/>
               </a:ext>
             </a:extLst>
           </p:cNvPr>
@@ -7116,8 +7115,8 @@
         </p:blipFill>
         <p:spPr>
           <a:xfrm>
-            <a:off x="0" y="1024258"/>
-            <a:ext cx="9144000" cy="3237859"/>
+            <a:off x="0" y="1209703"/>
+            <a:ext cx="9144000" cy="2983294"/>
           </a:xfrm>
           <a:prstGeom prst="rect">
             <a:avLst/>
@@ -7202,10 +7201,10 @@
       </p:sp>
       <p:pic>
         <p:nvPicPr>
-          <p:cNvPr id="3" name="Imagen 2">
+          <p:cNvPr id="4" name="Imagen 3">
             <a:extLst>
               <a:ext uri="{FF2B5EF4-FFF2-40B4-BE49-F238E27FC236}">
-                <a16:creationId xmlns:a16="http://schemas.microsoft.com/office/drawing/2014/main" id="{3AF6B1C9-BFD1-2DBE-F08E-7C68CF5A5F45}"/>
+                <a16:creationId xmlns:a16="http://schemas.microsoft.com/office/drawing/2014/main" id="{35271363-B6A6-BF90-9359-E9F4A1C6E0BD}"/>
               </a:ext>
             </a:extLst>
           </p:cNvPr>
@@ -7222,8 +7221,8 @@
         </p:blipFill>
         <p:spPr>
           <a:xfrm>
-            <a:off x="0" y="448320"/>
-            <a:ext cx="9144000" cy="4389736"/>
+            <a:off x="0" y="549971"/>
+            <a:ext cx="9144000" cy="4360357"/>
           </a:xfrm>
           <a:prstGeom prst="rect">
             <a:avLst/>
@@ -7244,118 +7243,6 @@
 </file>
 
 <file path=ppt/slides/slide16.xml><?xml version="1.0" encoding="utf-8"?>
-<p:sld xmlns:a="http://schemas.openxmlformats.org/drawingml/2006/main" xmlns:r="http://schemas.openxmlformats.org/officeDocument/2006/relationships" xmlns:p="http://schemas.openxmlformats.org/presentationml/2006/main">
-  <p:cSld>
-    <p:bg>
-      <p:bgPr>
-        <a:solidFill>
-          <a:srgbClr val="F8F9FA"/>
-        </a:solidFill>
-        <a:effectLst/>
-      </p:bgPr>
-    </p:bg>
-    <p:spTree>
-      <p:nvGrpSpPr>
-        <p:cNvPr id="1" name="">
-          <a:extLst>
-            <a:ext uri="{FF2B5EF4-FFF2-40B4-BE49-F238E27FC236}">
-              <a16:creationId xmlns:a16="http://schemas.microsoft.com/office/drawing/2014/main" id="{C0EBF18A-E5AE-8E53-34E0-8E063F792A83}"/>
-            </a:ext>
-          </a:extLst>
-        </p:cNvPr>
-        <p:cNvGrpSpPr/>
-        <p:nvPr/>
-      </p:nvGrpSpPr>
-      <p:grpSpPr>
-        <a:xfrm>
-          <a:off x="0" y="0"/>
-          <a:ext cx="0" cy="0"/>
-          <a:chOff x="0" y="0"/>
-          <a:chExt cx="0" cy="0"/>
-        </a:xfrm>
-      </p:grpSpPr>
-      <p:sp>
-        <p:nvSpPr>
-          <p:cNvPr id="6" name="CuadroTexto 5">
-            <a:extLst>
-              <a:ext uri="{FF2B5EF4-FFF2-40B4-BE49-F238E27FC236}">
-                <a16:creationId xmlns:a16="http://schemas.microsoft.com/office/drawing/2014/main" id="{5112E680-2395-4F78-0051-87A5EC221505}"/>
-              </a:ext>
-            </a:extLst>
-          </p:cNvPr>
-          <p:cNvSpPr txBox="1"/>
-          <p:nvPr/>
-        </p:nvSpPr>
-        <p:spPr>
-          <a:xfrm>
-            <a:off x="1926166" y="88135"/>
-            <a:ext cx="5291667" cy="307777"/>
-          </a:xfrm>
-          <a:prstGeom prst="rect">
-            <a:avLst/>
-          </a:prstGeom>
-          <a:noFill/>
-        </p:spPr>
-        <p:txBody>
-          <a:bodyPr wrap="square" rtlCol="0">
-            <a:spAutoFit/>
-          </a:bodyPr>
-          <a:lstStyle/>
-          <a:p>
-            <a:pPr algn="ctr"/>
-            <a:r>
-              <a:rPr lang="es-MX" b="1" dirty="0">
-                <a:latin typeface="Montserrat" pitchFamily="2" charset="0"/>
-              </a:rPr>
-              <a:t>Temas de gobierno por radiodifusora</a:t>
-            </a:r>
-          </a:p>
-        </p:txBody>
-      </p:sp>
-      <p:pic>
-        <p:nvPicPr>
-          <p:cNvPr id="2" name="Imagen 1">
-            <a:extLst>
-              <a:ext uri="{FF2B5EF4-FFF2-40B4-BE49-F238E27FC236}">
-                <a16:creationId xmlns:a16="http://schemas.microsoft.com/office/drawing/2014/main" id="{16D72B59-C499-4B61-7AAD-1A83B52707DC}"/>
-              </a:ext>
-            </a:extLst>
-          </p:cNvPr>
-          <p:cNvPicPr>
-            <a:picLocks noChangeAspect="1"/>
-          </p:cNvPicPr>
-          <p:nvPr/>
-        </p:nvPicPr>
-        <p:blipFill>
-          <a:blip r:embed="rId2"/>
-          <a:stretch>
-            <a:fillRect/>
-          </a:stretch>
-        </p:blipFill>
-        <p:spPr>
-          <a:xfrm>
-            <a:off x="2000249" y="933450"/>
-            <a:ext cx="5143500" cy="3419475"/>
-          </a:xfrm>
-          <a:prstGeom prst="rect">
-            <a:avLst/>
-          </a:prstGeom>
-        </p:spPr>
-      </p:pic>
-    </p:spTree>
-    <p:extLst>
-      <p:ext uri="{BB962C8B-B14F-4D97-AF65-F5344CB8AC3E}">
-        <p14:creationId xmlns:p14="http://schemas.microsoft.com/office/powerpoint/2010/main" val="3551812136"/>
-      </p:ext>
-    </p:extLst>
-  </p:cSld>
-  <p:clrMapOvr>
-    <a:masterClrMapping/>
-  </p:clrMapOvr>
-</p:sld>
-</file>
-
-<file path=ppt/slides/slide17.xml><?xml version="1.0" encoding="utf-8"?>
 <p:sld xmlns:a="http://schemas.openxmlformats.org/drawingml/2006/main" xmlns:r="http://schemas.openxmlformats.org/officeDocument/2006/relationships" xmlns:p="http://schemas.openxmlformats.org/presentationml/2006/main">
   <p:cSld>
     <p:bg>
@@ -7424,36 +7311,44 @@
           </a:p>
         </p:txBody>
       </p:sp>
-      <p:pic>
-        <p:nvPicPr>
-          <p:cNvPr id="4" name="Imagen 3">
+      <p:sp>
+        <p:nvSpPr>
+          <p:cNvPr id="2" name="CuadroTexto 1">
             <a:extLst>
               <a:ext uri="{FF2B5EF4-FFF2-40B4-BE49-F238E27FC236}">
-                <a16:creationId xmlns:a16="http://schemas.microsoft.com/office/drawing/2014/main" id="{4E96AFEE-87C9-F300-BADC-BB1E201B3831}"/>
+                <a16:creationId xmlns:a16="http://schemas.microsoft.com/office/drawing/2014/main" id="{0B566944-67F3-B2A9-13BA-A9D527E8CD3A}"/>
               </a:ext>
             </a:extLst>
           </p:cNvPr>
-          <p:cNvPicPr>
-            <a:picLocks noChangeAspect="1"/>
-          </p:cNvPicPr>
+          <p:cNvSpPr txBox="1"/>
           <p:nvPr/>
-        </p:nvPicPr>
-        <p:blipFill>
-          <a:blip r:embed="rId2"/>
-          <a:stretch>
-            <a:fillRect/>
-          </a:stretch>
-        </p:blipFill>
+        </p:nvSpPr>
         <p:spPr>
           <a:xfrm>
-            <a:off x="458761" y="356853"/>
-            <a:ext cx="8153454" cy="4786647"/>
+            <a:off x="316800" y="2166134"/>
+            <a:ext cx="8236800" cy="954107"/>
           </a:xfrm>
           <a:prstGeom prst="rect">
             <a:avLst/>
           </a:prstGeom>
+          <a:noFill/>
         </p:spPr>
-      </p:pic>
+        <p:txBody>
+          <a:bodyPr wrap="square" rtlCol="0">
+            <a:spAutoFit/>
+          </a:bodyPr>
+          <a:lstStyle/>
+          <a:p>
+            <a:pPr algn="ctr"/>
+            <a:r>
+              <a:rPr lang="es-MX" sz="2800" b="1" dirty="0">
+                <a:latin typeface="Montserrat" panose="00000500000000000000" pitchFamily="2" charset="0"/>
+              </a:rPr>
+              <a:t>Hoy no se registraron llamadas de radioescuchas</a:t>
+            </a:r>
+          </a:p>
+        </p:txBody>
+      </p:sp>
     </p:spTree>
     <p:extLst>
       <p:ext uri="{BB962C8B-B14F-4D97-AF65-F5344CB8AC3E}">
@@ -7467,7 +7362,7 @@
 </p:sld>
 </file>
 
-<file path=ppt/slides/slide18.xml><?xml version="1.0" encoding="utf-8"?>
+<file path=ppt/slides/slide17.xml><?xml version="1.0" encoding="utf-8"?>
 <p:sld xmlns:a="http://schemas.openxmlformats.org/drawingml/2006/main" xmlns:r="http://schemas.openxmlformats.org/officeDocument/2006/relationships" xmlns:p="http://schemas.openxmlformats.org/presentationml/2006/main">
   <p:cSld>
     <p:spTree>
